--- a/content/decks/a-level-art-design/9479-s1-a1-recording.pptx
+++ b/content/decks/a-level-art-design/9479-s1-a1-recording.pptx
@@ -4060,7 +4060,7 @@
       </p:grpSpPr>
       <p:pic>
         <p:nvPicPr>
-          <p:cNvPr id="2" name="Image 0" descr="/private/tmp/claude-501/-Users-dogan-Documents-Vaults-Courses/3954bcc8-cc8d-4110-bd5a-74962061a805/scratchpad/decks/img/crops/rubens-sheet-forearm_a1777.jpg">    </p:cNvPr>
+          <p:cNvPr id="2" name="Image 0" descr="/Users/dogan/Documents/Vaults/Courses/wiki/classes/a-level-art-design/decks/_build/img/crops/rubens-sheet-forearm_a1777.jpg">    </p:cNvPr>
           <p:cNvPicPr>
             <a:picLocks noChangeAspect="1"/>
           </p:cNvPicPr>
@@ -4881,7 +4881,7 @@
       </p:grpSpPr>
       <p:pic>
         <p:nvPicPr>
-          <p:cNvPr id="2" name="Image 0" descr="/private/tmp/claude-501/-Users-dogan-Documents-Vaults-Courses/3954bcc8-cc8d-4110-bd5a-74962061a805/scratchpad/decks/img/crops/repin-naked-sketch_a691.jpg">    </p:cNvPr>
+          <p:cNvPr id="2" name="Image 0" descr="/Users/dogan/Documents/Vaults/Courses/wiki/classes/a-level-art-design/decks/_build/img/crops/repin-kozy_a691.jpg">    </p:cNvPr>
           <p:cNvPicPr>
             <a:picLocks noChangeAspect="1"/>
           </p:cNvPicPr>
@@ -4938,7 +4938,7 @@
                 <a:ea typeface="Arial" pitchFamily="34" charset="-122"/>
                 <a:cs typeface="Arial" pitchFamily="34" charset="-120"/>
               </a:rPr>
-              <a:t>Ilya Repin, study. Public domain</a:t>
+              <a:t>Ilya Repin, Portrait of Mitrophan Kozy, 1880. Public domain</a:t>
             </a:r>
             <a:endParaRPr lang="en-US" sz="950" dirty="0"/>
           </a:p>
@@ -5484,7 +5484,7 @@
       </p:sp>
       <p:pic>
         <p:nvPicPr>
-          <p:cNvPr id="7" name="Image 0" descr="/private/tmp/claude-501/-Users-dogan-Documents-Vaults-Courses/3954bcc8-cc8d-4110-bd5a-74962061a805/scratchpad/decks/img/rubens-three-figures.jpg">    </p:cNvPr>
+          <p:cNvPr id="7" name="Image 0" descr="/Users/dogan/Documents/Vaults/Courses/wiki/classes/a-level-art-design/decks/_build/img/rubens-three-figures.jpg">    </p:cNvPr>
           <p:cNvPicPr>
             <a:picLocks noChangeAspect="1"/>
           </p:cNvPicPr>
@@ -5611,7 +5611,7 @@
       </p:sp>
       <p:pic>
         <p:nvPicPr>
-          <p:cNvPr id="11" name="Image 1" descr="/private/tmp/claude-501/-Users-dogan-Documents-Vaults-Courses/3954bcc8-cc8d-4110-bd5a-74962061a805/scratchpad/decks/img/rubens-anatomical-studies.jpg">    </p:cNvPr>
+          <p:cNvPr id="11" name="Image 1" descr="/Users/dogan/Documents/Vaults/Courses/wiki/classes/a-level-art-design/decks/_build/img/rubens-anatomical-studies.jpg">    </p:cNvPr>
           <p:cNvPicPr>
             <a:picLocks noChangeAspect="1"/>
           </p:cNvPicPr>
@@ -5738,7 +5738,7 @@
       </p:sp>
       <p:pic>
         <p:nvPicPr>
-          <p:cNvPr id="15" name="Image 2" descr="/private/tmp/claude-501/-Users-dogan-Documents-Vaults-Courses/3954bcc8-cc8d-4110-bd5a-74962061a805/scratchpad/decks/img/repin-stoking-fire.jpg">    </p:cNvPr>
+          <p:cNvPr id="15" name="Image 2" descr="/Users/dogan/Documents/Vaults/Courses/wiki/classes/a-level-art-design/decks/_build/img/repin-stoking-fire.jpg">    </p:cNvPr>
           <p:cNvPicPr>
             <a:picLocks noChangeAspect="1"/>
           </p:cNvPicPr>
